--- a/毕设/中期PPT-杨宇.pptx
+++ b/毕设/中期PPT-杨宇.pptx
@@ -5,31 +5,31 @@
     <p:sldMasterId id="2147483648" r:id="rId1"/>
   </p:sldMasterIdLst>
   <p:sldIdLst>
-    <p:sldId id="261" r:id="rId3"/>
-    <p:sldId id="263" r:id="rId4"/>
-    <p:sldId id="264" r:id="rId5"/>
-    <p:sldId id="270" r:id="rId6"/>
-    <p:sldId id="265" r:id="rId7"/>
-    <p:sldId id="273" r:id="rId8"/>
-    <p:sldId id="274" r:id="rId9"/>
-    <p:sldId id="283" r:id="rId10"/>
-    <p:sldId id="284" r:id="rId11"/>
-    <p:sldId id="285" r:id="rId12"/>
-    <p:sldId id="286" r:id="rId13"/>
-    <p:sldId id="287" r:id="rId14"/>
-    <p:sldId id="288" r:id="rId15"/>
-    <p:sldId id="289" r:id="rId16"/>
-    <p:sldId id="290" r:id="rId17"/>
-    <p:sldId id="266" r:id="rId18"/>
-    <p:sldId id="275" r:id="rId19"/>
-    <p:sldId id="267" r:id="rId20"/>
-    <p:sldId id="277" r:id="rId21"/>
-    <p:sldId id="268" r:id="rId22"/>
+    <p:sldId id="261" r:id="rId2"/>
+    <p:sldId id="263" r:id="rId3"/>
+    <p:sldId id="264" r:id="rId4"/>
+    <p:sldId id="270" r:id="rId5"/>
+    <p:sldId id="265" r:id="rId6"/>
+    <p:sldId id="273" r:id="rId7"/>
+    <p:sldId id="274" r:id="rId8"/>
+    <p:sldId id="283" r:id="rId9"/>
+    <p:sldId id="284" r:id="rId10"/>
+    <p:sldId id="285" r:id="rId11"/>
+    <p:sldId id="286" r:id="rId12"/>
+    <p:sldId id="287" r:id="rId13"/>
+    <p:sldId id="288" r:id="rId14"/>
+    <p:sldId id="289" r:id="rId15"/>
+    <p:sldId id="290" r:id="rId16"/>
+    <p:sldId id="266" r:id="rId17"/>
+    <p:sldId id="275" r:id="rId18"/>
+    <p:sldId id="267" r:id="rId19"/>
+    <p:sldId id="277" r:id="rId20"/>
+    <p:sldId id="268" r:id="rId21"/>
   </p:sldIdLst>
   <p:sldSz cx="12192000" cy="6858000"/>
   <p:notesSz cx="6858000" cy="9144000"/>
   <p:custDataLst>
-    <p:tags r:id="rId26"/>
+    <p:tags r:id="rId22"/>
   </p:custDataLst>
   <p:defaultTextStyle>
     <a:defPPr>
@@ -662,7 +662,6 @@
               <a:rPr lang="zh-CN" altLang="en-US"/>
               <a:t>单击此处编辑母版标题样式</a:t>
             </a:r>
-            <a:endParaRPr lang="zh-CN" altLang="en-US"/>
           </a:p>
         </p:txBody>
       </p:sp>
@@ -696,7 +695,6 @@
               <a:rPr lang="zh-CN" altLang="en-US"/>
               <a:t>编辑母版文本样式</a:t>
             </a:r>
-            <a:endParaRPr lang="zh-CN" altLang="en-US"/>
           </a:p>
           <a:p>
             <a:pPr lvl="1"/>
@@ -704,7 +702,6 @@
               <a:rPr lang="zh-CN" altLang="en-US"/>
               <a:t>第二级</a:t>
             </a:r>
-            <a:endParaRPr lang="zh-CN" altLang="en-US"/>
           </a:p>
           <a:p>
             <a:pPr lvl="2"/>
@@ -712,7 +709,6 @@
               <a:rPr lang="zh-CN" altLang="en-US"/>
               <a:t>第三级</a:t>
             </a:r>
-            <a:endParaRPr lang="zh-CN" altLang="en-US"/>
           </a:p>
           <a:p>
             <a:pPr lvl="3"/>
@@ -720,7 +716,6 @@
               <a:rPr lang="zh-CN" altLang="en-US"/>
               <a:t>第四级</a:t>
             </a:r>
-            <a:endParaRPr lang="zh-CN" altLang="en-US"/>
           </a:p>
           <a:p>
             <a:pPr lvl="4"/>
@@ -728,7 +723,6 @@
               <a:rPr lang="zh-CN" altLang="en-US"/>
               <a:t>第五级</a:t>
             </a:r>
-            <a:endParaRPr lang="zh-CN" altLang="en-US"/>
           </a:p>
         </p:txBody>
       </p:sp>
@@ -767,6 +761,7 @@
           <a:p>
             <a:fld id="{4BB25AA1-309F-48F9-8459-26290E6D0980}" type="datetimeFigureOut">
               <a:rPr lang="zh-CN" altLang="en-US" smtClean="0"/>
+              <a:t>2023/5/15</a:t>
             </a:fld>
             <a:endParaRPr lang="zh-CN" altLang="en-US"/>
           </a:p>
@@ -844,6 +839,7 @@
           <a:p>
             <a:fld id="{816C6489-F1D8-4358-8651-DCD9C7CCF74C}" type="slidenum">
               <a:rPr lang="zh-CN" altLang="en-US" smtClean="0"/>
+              <a:t>‹#›</a:t>
             </a:fld>
             <a:endParaRPr lang="zh-CN" altLang="en-US"/>
           </a:p>
@@ -1614,13 +1610,6 @@
               </a:rPr>
               <a:t>基于互补滤波的多传感器数据融合</a:t>
             </a:r>
-            <a:endParaRPr lang="zh-CN" altLang="en-US" sz="3200" dirty="0">
-              <a:solidFill>
-                <a:schemeClr val="accent1"/>
-              </a:solidFill>
-              <a:latin typeface="微软雅黑" panose="020B0503020204020204" pitchFamily="34" charset="-122"/>
-              <a:ea typeface="微软雅黑" panose="020B0503020204020204" pitchFamily="34" charset="-122"/>
-            </a:endParaRPr>
           </a:p>
           <a:p>
             <a:pPr algn="ctr"/>
@@ -1634,13 +1623,6 @@
               </a:rPr>
               <a:t>　　算法设计及实现</a:t>
             </a:r>
-            <a:endParaRPr lang="zh-CN" altLang="en-US" sz="3200" dirty="0">
-              <a:solidFill>
-                <a:schemeClr val="accent1"/>
-              </a:solidFill>
-              <a:latin typeface="微软雅黑" panose="020B0503020204020204" pitchFamily="34" charset="-122"/>
-              <a:ea typeface="微软雅黑" panose="020B0503020204020204" pitchFamily="34" charset="-122"/>
-            </a:endParaRPr>
           </a:p>
         </p:txBody>
       </p:sp>
@@ -1676,13 +1658,6 @@
               </a:rPr>
               <a:t>Multi-sensor data fusion based on complementary filteringAlgorithm design and implementation</a:t>
             </a:r>
-            <a:endParaRPr lang="en-US" altLang="zh-CN" sz="1400" dirty="0">
-              <a:solidFill>
-                <a:schemeClr val="accent1"/>
-              </a:solidFill>
-              <a:latin typeface="Arial" panose="020B0604020202020204" pitchFamily="34" charset="0"/>
-              <a:cs typeface="Arial" panose="020B0604020202020204" pitchFamily="34" charset="0"/>
-            </a:endParaRPr>
           </a:p>
         </p:txBody>
       </p:sp>
@@ -1734,6 +1709,7 @@
               <a:bodyPr wrap="square" rtlCol="0">
                 <a:spAutoFit/>
               </a:bodyPr>
+              <a:lstStyle/>
               <a:p>
                 <a:pPr marL="0" marR="0" lvl="0" algn="ctr" defTabSz="914400" rtl="0" eaLnBrk="1" fontAlgn="auto" latinLnBrk="0" hangingPunct="1">
                   <a:lnSpc>
@@ -1756,27 +1732,8 @@
                     <a:ea typeface="微软雅黑" panose="020B0503020204020204" pitchFamily="34" charset="-122"/>
                     <a:sym typeface="+mn-lt"/>
                   </a:rPr>
-                  <a:t>汇报人：</a:t>
+                  <a:t>汇报人：杨宇</a:t>
                 </a:r>
-                <a:r>
-                  <a:rPr kumimoji="0" lang="zh-CN" altLang="en-US" b="0" i="0" u="none" strike="noStrike" kern="1200" cap="none" spc="0" normalizeH="0" baseline="0" dirty="0">
-                    <a:solidFill>
-                      <a:schemeClr val="accent1"/>
-                    </a:solidFill>
-                    <a:latin typeface="微软雅黑" panose="020B0503020204020204" pitchFamily="34" charset="-122"/>
-                    <a:ea typeface="微软雅黑" panose="020B0503020204020204" pitchFamily="34" charset="-122"/>
-                    <a:sym typeface="+mn-lt"/>
-                  </a:rPr>
-                  <a:t>杨宇</a:t>
-                </a:r>
-                <a:endParaRPr kumimoji="0" lang="zh-CN" altLang="en-US" b="0" i="0" u="none" strike="noStrike" kern="1200" cap="none" spc="0" normalizeH="0" baseline="0" dirty="0">
-                  <a:solidFill>
-                    <a:schemeClr val="accent1"/>
-                  </a:solidFill>
-                  <a:latin typeface="微软雅黑" panose="020B0503020204020204" pitchFamily="34" charset="-122"/>
-                  <a:ea typeface="微软雅黑" panose="020B0503020204020204" pitchFamily="34" charset="-122"/>
-                  <a:sym typeface="+mn-lt"/>
-                </a:endParaRPr>
               </a:p>
             </p:txBody>
           </p:sp>
@@ -1800,6 +1757,7 @@
               <a:bodyPr wrap="square" rtlCol="0">
                 <a:spAutoFit/>
               </a:bodyPr>
+              <a:lstStyle/>
               <a:p>
                 <a:pPr marL="0" marR="0" lvl="0" indent="0" defTabSz="914400" rtl="0" eaLnBrk="1" fontAlgn="auto" latinLnBrk="0" hangingPunct="1">
                   <a:lnSpc>
@@ -1889,10 +1847,10 @@
             <p:nvPr/>
           </p:nvPicPr>
           <p:blipFill>
-            <a:blip r:embed="rId1">
+            <a:blip r:embed="rId2">
               <a:extLst>
                 <a:ext uri="{96DAC541-7B7A-43D3-8B79-37D633B846F1}">
-                  <asvg:svgBlip xmlns:asvg="http://schemas.microsoft.com/office/drawing/2016/SVG/main" r:embed="rId2"/>
+                  <asvg:svgBlip xmlns:asvg="http://schemas.microsoft.com/office/drawing/2016/SVG/main" r:embed="rId3"/>
                 </a:ext>
               </a:extLst>
             </a:blip>
@@ -1919,10 +1877,10 @@
             <p:nvPr/>
           </p:nvPicPr>
           <p:blipFill>
-            <a:blip r:embed="rId3">
+            <a:blip r:embed="rId4">
               <a:extLst>
                 <a:ext uri="{96DAC541-7B7A-43D3-8B79-37D633B846F1}">
-                  <asvg:svgBlip xmlns:asvg="http://schemas.microsoft.com/office/drawing/2016/SVG/main" r:embed="rId4"/>
+                  <asvg:svgBlip xmlns:asvg="http://schemas.microsoft.com/office/drawing/2016/SVG/main" r:embed="rId5"/>
                 </a:ext>
               </a:extLst>
             </a:blip>
@@ -2549,10 +2507,11 @@
           <a:bodyPr>
             <a:noAutofit/>
           </a:bodyPr>
+          <a:lstStyle/>
           <a:p>
             <a:pPr indent="266700" algn="l"/>
             <a:r>
-              <a:rPr lang="zh-CN" sz="2000">
+              <a:rPr lang="zh-CN" sz="2000" dirty="0">
                 <a:latin typeface="宋体" panose="02010600030101010101" pitchFamily="2" charset="-122"/>
                 <a:ea typeface="宋体" panose="02010600030101010101" pitchFamily="2" charset="-122"/>
                 <a:cs typeface="宋体" panose="02010600030101010101" pitchFamily="2" charset="-122"/>
@@ -2560,7 +2519,7 @@
               </a:rPr>
               <a:t>MAG由于地球磁场环境下，各个地区的磁场强度，磁倾角，磁偏角不同，因此需要采集后的结果进行磁补偿。通过查表法查找世界地磁场模型（WMM），便可以获取当地的磁场信息用于磁补偿。</a:t>
             </a:r>
-            <a:endParaRPr lang="zh-CN" sz="2000" b="0">
+            <a:endParaRPr lang="zh-CN" sz="2000" b="0" dirty="0">
               <a:latin typeface="宋体" panose="02010600030101010101" pitchFamily="2" charset="-122"/>
               <a:ea typeface="宋体" panose="02010600030101010101" pitchFamily="2" charset="-122"/>
               <a:cs typeface="宋体" panose="02010600030101010101" pitchFamily="2" charset="-122"/>
@@ -2581,7 +2540,7 @@
           </p:nvPr>
         </p:nvPicPr>
         <p:blipFill>
-          <a:blip r:embed="rId2"/>
+          <a:blip r:embed="rId3"/>
           <a:stretch>
             <a:fillRect/>
           </a:stretch>
@@ -2623,13 +2582,13 @@
           <a:bodyPr>
             <a:spAutoFit/>
           </a:bodyPr>
+          <a:lstStyle/>
           <a:p>
             <a:pPr indent="266700" algn="ctr"/>
             <a:r>
               <a:rPr lang="zh-CN" altLang="en-US" b="0"/>
               <a:t>图6 查表法获取当地磁场强度，磁偏角等</a:t>
             </a:r>
-            <a:endParaRPr lang="zh-CN" altLang="en-US" b="0"/>
           </a:p>
         </p:txBody>
       </p:sp>
@@ -3063,37 +3022,28 @@
           <a:bodyPr>
             <a:noAutofit/>
           </a:bodyPr>
+          <a:lstStyle/>
           <a:p>
             <a:pPr indent="266700"/>
             <a:r>
-              <a:rPr lang="zh-CN" sz="2000" b="0">
+              <a:rPr lang="zh-CN" sz="2000" b="0" dirty="0">
                 <a:latin typeface="宋体" panose="02010600030101010101" pitchFamily="2" charset="-122"/>
                 <a:ea typeface="宋体" panose="02010600030101010101" pitchFamily="2" charset="-122"/>
                 <a:cs typeface="宋体" panose="02010600030101010101" pitchFamily="2" charset="-122"/>
               </a:rPr>
               <a:t>Part 2.数据融合。数据融合算法的主要思想为将IMU作为主要的PVA（位置、速度、姿态）感知单元，同时引入GPS，MAG等辅助传感器进行实时地修正，以达到优势互补，和精度更高的效果。常见的数据融合算法是扩展卡尔曼滤波（Extended Kalman Filter, EKF）算法，但是扩展卡尔曼滤波算法的计算复杂度较高，不适合在单片机这种低性能的设备上使用，因此这里选用互补滤波加闭环纯比例控制的算法，即将辅助传感器的修正值直接乘以比例作用到IMU的预测值上。</a:t>
             </a:r>
-            <a:endParaRPr lang="zh-CN" sz="2000" b="0">
-              <a:latin typeface="宋体" panose="02010600030101010101" pitchFamily="2" charset="-122"/>
-              <a:ea typeface="宋体" panose="02010600030101010101" pitchFamily="2" charset="-122"/>
-              <a:cs typeface="宋体" panose="02010600030101010101" pitchFamily="2" charset="-122"/>
-            </a:endParaRPr>
           </a:p>
           <a:p>
             <a:pPr indent="266700"/>
             <a:r>
-              <a:rPr lang="zh-CN" sz="2000" b="0">
+              <a:rPr lang="zh-CN" sz="2000" b="0" dirty="0">
                 <a:latin typeface="宋体" panose="02010600030101010101" pitchFamily="2" charset="-122"/>
                 <a:ea typeface="宋体" panose="02010600030101010101" pitchFamily="2" charset="-122"/>
                 <a:cs typeface="宋体" panose="02010600030101010101" pitchFamily="2" charset="-122"/>
               </a:rPr>
               <a:t>姿态更新：原理为四元数的微分方程的离散化方程（RK1）。因此在已知初始姿态的情况下，只需传入当前时刻修正后的角速度，即可获取实时姿态。</a:t>
             </a:r>
-            <a:endParaRPr lang="zh-CN" sz="2000" b="0">
-              <a:latin typeface="宋体" panose="02010600030101010101" pitchFamily="2" charset="-122"/>
-              <a:ea typeface="宋体" panose="02010600030101010101" pitchFamily="2" charset="-122"/>
-              <a:cs typeface="宋体" panose="02010600030101010101" pitchFamily="2" charset="-122"/>
-            </a:endParaRPr>
           </a:p>
         </p:txBody>
       </p:sp>
@@ -3110,7 +3060,7 @@
           </p:nvPr>
         </p:nvPicPr>
         <p:blipFill>
-          <a:blip r:embed="rId2"/>
+          <a:blip r:embed="rId4"/>
           <a:stretch>
             <a:fillRect/>
           </a:stretch>
@@ -3148,13 +3098,13 @@
           <a:bodyPr>
             <a:spAutoFit/>
           </a:bodyPr>
+          <a:lstStyle/>
           <a:p>
             <a:pPr indent="0" algn="ctr"/>
             <a:r>
               <a:rPr lang="zh-CN" altLang="en-US" b="0"/>
               <a:t>图7四元数的微分方程的离散化方程</a:t>
             </a:r>
-            <a:endParaRPr lang="zh-CN" altLang="en-US" b="0"/>
           </a:p>
         </p:txBody>
       </p:sp>
@@ -3166,12 +3116,12 @@
           </p:cNvPicPr>
           <p:nvPr>
             <p:custDataLst>
-              <p:tags r:id="rId3"/>
+              <p:tags r:id="rId2"/>
             </p:custDataLst>
           </p:nvPr>
         </p:nvPicPr>
         <p:blipFill>
-          <a:blip r:embed="rId4"/>
+          <a:blip r:embed="rId5"/>
           <a:stretch>
             <a:fillRect/>
           </a:stretch>
@@ -3210,6 +3160,7 @@
           <a:bodyPr wrap="square" rtlCol="0">
             <a:spAutoFit/>
           </a:bodyPr>
+          <a:lstStyle/>
           <a:p>
             <a:r>
               <a:rPr lang="zh-CN" altLang="en-US"/>
@@ -3223,7 +3174,6 @@
               <a:rPr lang="zh-CN" altLang="en-US"/>
               <a:t>四元数姿态更新方程</a:t>
             </a:r>
-            <a:endParaRPr lang="zh-CN" altLang="en-US"/>
           </a:p>
         </p:txBody>
       </p:sp>
@@ -3657,17 +3607,21 @@
           <a:bodyPr>
             <a:noAutofit/>
           </a:bodyPr>
+          <a:lstStyle/>
           <a:p>
             <a:pPr indent="266700"/>
             <a:r>
-              <a:rPr lang="zh-CN" sz="2000" b="0">
+              <a:rPr lang="zh-CN" sz="2000" b="0" dirty="0">
                 <a:latin typeface="宋体" panose="02010600030101010101" pitchFamily="2" charset="-122"/>
                 <a:ea typeface="宋体" panose="02010600030101010101" pitchFamily="2" charset="-122"/>
                 <a:cs typeface="宋体" panose="02010600030101010101" pitchFamily="2" charset="-122"/>
               </a:rPr>
               <a:t>姿态修正：姿态修正的核心思想主要为闭环纯比例控制，将理想的方向向量与实际的方向向量的叉积作为偏差，经过比例P环节后给到角速度的修正。其中，姿态修正分为加速度修正和航向修正。以加速度修正为例，将IMU测得的加速度作为理想的加速度a1向量，将GPS测得的运动速度的微分（并不存在真实的微分，这里使用微分加二阶临界阻尼系统近似模拟微分，如下图）作为实际运动加速度a2向量，a1,a2向量叉积得到加速度修正值，如下图。</a:t>
             </a:r>
-            <a:endParaRPr lang="zh-CN" sz="2000" b="0">
+          </a:p>
+          <a:p>
+            <a:pPr indent="266700"/>
+            <a:endParaRPr lang="zh-CN" sz="2000" b="0" dirty="0">
               <a:latin typeface="宋体" panose="02010600030101010101" pitchFamily="2" charset="-122"/>
               <a:ea typeface="宋体" panose="02010600030101010101" pitchFamily="2" charset="-122"/>
               <a:cs typeface="宋体" panose="02010600030101010101" pitchFamily="2" charset="-122"/>
@@ -3675,7 +3629,7 @@
           </a:p>
           <a:p>
             <a:pPr indent="266700"/>
-            <a:endParaRPr lang="zh-CN" sz="2000" b="0">
+            <a:endParaRPr lang="zh-CN" sz="2000" b="0" dirty="0">
               <a:latin typeface="宋体" panose="02010600030101010101" pitchFamily="2" charset="-122"/>
               <a:ea typeface="宋体" panose="02010600030101010101" pitchFamily="2" charset="-122"/>
               <a:cs typeface="宋体" panose="02010600030101010101" pitchFamily="2" charset="-122"/>
@@ -3683,15 +3637,7 @@
           </a:p>
           <a:p>
             <a:pPr indent="266700"/>
-            <a:endParaRPr lang="zh-CN" sz="2000" b="0">
-              <a:latin typeface="宋体" panose="02010600030101010101" pitchFamily="2" charset="-122"/>
-              <a:ea typeface="宋体" panose="02010600030101010101" pitchFamily="2" charset="-122"/>
-              <a:cs typeface="宋体" panose="02010600030101010101" pitchFamily="2" charset="-122"/>
-            </a:endParaRPr>
-          </a:p>
-          <a:p>
-            <a:pPr indent="266700"/>
-            <a:endParaRPr lang="zh-CN" sz="2000" b="0">
+            <a:endParaRPr lang="zh-CN" sz="2000" b="0" dirty="0">
               <a:latin typeface="宋体" panose="02010600030101010101" pitchFamily="2" charset="-122"/>
               <a:ea typeface="宋体" panose="02010600030101010101" pitchFamily="2" charset="-122"/>
               <a:cs typeface="宋体" panose="02010600030101010101" pitchFamily="2" charset="-122"/>
@@ -3712,7 +3658,7 @@
           </p:nvPr>
         </p:nvPicPr>
         <p:blipFill>
-          <a:blip r:embed="rId2"/>
+          <a:blip r:embed="rId4"/>
           <a:stretch>
             <a:fillRect/>
           </a:stretch>
@@ -3754,6 +3700,7 @@
           <a:bodyPr>
             <a:spAutoFit/>
           </a:bodyPr>
+          <a:lstStyle/>
           <a:p>
             <a:pPr indent="0" algn="ctr"/>
             <a:r>
@@ -3775,12 +3722,12 @@
           </p:cNvPicPr>
           <p:nvPr>
             <p:custDataLst>
-              <p:tags r:id="rId3"/>
+              <p:tags r:id="rId2"/>
             </p:custDataLst>
           </p:nvPr>
         </p:nvPicPr>
         <p:blipFill>
-          <a:blip r:embed="rId4"/>
+          <a:blip r:embed="rId5"/>
           <a:stretch>
             <a:fillRect/>
           </a:stretch>
@@ -3822,6 +3769,7 @@
           <a:bodyPr>
             <a:spAutoFit/>
           </a:bodyPr>
+          <a:lstStyle/>
           <a:p>
             <a:pPr algn="ctr">
               <a:buClrTx/>
@@ -3832,7 +3780,6 @@
               <a:rPr lang="en-US" altLang="zh-CN" b="0"/>
               <a:t>图9加速度修正环节</a:t>
             </a:r>
-            <a:endParaRPr lang="en-US" altLang="zh-CN" b="0"/>
           </a:p>
         </p:txBody>
       </p:sp>
@@ -4266,21 +4213,17 @@
           <a:bodyPr>
             <a:noAutofit/>
           </a:bodyPr>
+          <a:lstStyle/>
           <a:p>
             <a:pPr indent="266700"/>
             <a:r>
-              <a:rPr lang="zh-CN" sz="2000" b="0">
+              <a:rPr lang="zh-CN" sz="2000" b="0" dirty="0">
                 <a:latin typeface="宋体" panose="02010600030101010101" pitchFamily="2" charset="-122"/>
                 <a:ea typeface="宋体" panose="02010600030101010101" pitchFamily="2" charset="-122"/>
                 <a:cs typeface="宋体" panose="02010600030101010101" pitchFamily="2" charset="-122"/>
               </a:rPr>
               <a:t>位置速度更新：静止状态下，由IMU获取的加速度通过积分得到速度，再次积分得到位置。</a:t>
             </a:r>
-            <a:endParaRPr lang="zh-CN" sz="2000" b="0">
-              <a:latin typeface="宋体" panose="02010600030101010101" pitchFamily="2" charset="-122"/>
-              <a:ea typeface="宋体" panose="02010600030101010101" pitchFamily="2" charset="-122"/>
-              <a:cs typeface="宋体" panose="02010600030101010101" pitchFamily="2" charset="-122"/>
-            </a:endParaRPr>
           </a:p>
         </p:txBody>
       </p:sp>
@@ -4297,7 +4240,7 @@
           </p:nvPr>
         </p:nvPicPr>
         <p:blipFill>
-          <a:blip r:embed="rId2"/>
+          <a:blip r:embed="rId3"/>
           <a:stretch>
             <a:fillRect/>
           </a:stretch>
@@ -4339,13 +4282,13 @@
           <a:bodyPr>
             <a:spAutoFit/>
           </a:bodyPr>
+          <a:lstStyle/>
           <a:p>
             <a:pPr indent="0" algn="ctr"/>
             <a:r>
               <a:rPr lang="en-US" altLang="zh-CN" b="0"/>
               <a:t>图10位置速度更新环节</a:t>
             </a:r>
-            <a:endParaRPr lang="en-US" altLang="zh-CN" b="0"/>
           </a:p>
         </p:txBody>
       </p:sp>
@@ -4372,6 +4315,7 @@
           <a:bodyPr wrap="square">
             <a:spAutoFit/>
           </a:bodyPr>
+          <a:lstStyle/>
           <a:p>
             <a:pPr indent="127000"/>
             <a:endParaRPr lang="zh-CN" sz="2000" b="0">
@@ -4812,10 +4756,11 @@
           <a:bodyPr>
             <a:noAutofit/>
           </a:bodyPr>
+          <a:lstStyle/>
           <a:p>
             <a:pPr indent="127000"/>
             <a:r>
-              <a:rPr lang="zh-CN" sz="2000">
+              <a:rPr lang="zh-CN" sz="2000" dirty="0">
                 <a:latin typeface="宋体" panose="02010600030101010101" pitchFamily="2" charset="-122"/>
                 <a:ea typeface="宋体" panose="02010600030101010101" pitchFamily="2" charset="-122"/>
                 <a:cs typeface="宋体" panose="02010600030101010101" pitchFamily="2" charset="-122"/>
@@ -4823,7 +4768,7 @@
               </a:rPr>
               <a:t>位置速度修正：将更新后的位置速度与GPS测量后的结果进行比较，输出经过比例控制后给到位置和速    度的修正。</a:t>
             </a:r>
-            <a:endParaRPr lang="zh-CN" sz="2000" b="0">
+            <a:endParaRPr lang="zh-CN" sz="2000" b="0" dirty="0">
               <a:latin typeface="宋体" panose="02010600030101010101" pitchFamily="2" charset="-122"/>
               <a:ea typeface="宋体" panose="02010600030101010101" pitchFamily="2" charset="-122"/>
               <a:cs typeface="宋体" panose="02010600030101010101" pitchFamily="2" charset="-122"/>
@@ -4844,7 +4789,7 @@
           </p:nvPr>
         </p:nvPicPr>
         <p:blipFill>
-          <a:blip r:embed="rId2"/>
+          <a:blip r:embed="rId3"/>
           <a:stretch>
             <a:fillRect/>
           </a:stretch>
@@ -4886,6 +4831,7 @@
           <a:bodyPr>
             <a:spAutoFit/>
           </a:bodyPr>
+          <a:lstStyle/>
           <a:p>
             <a:pPr algn="ctr">
               <a:buClrTx/>
@@ -4896,7 +4842,6 @@
               <a:rPr lang="en-US" altLang="zh-CN" b="0"/>
               <a:t>图11位置速度修正环节</a:t>
             </a:r>
-            <a:endParaRPr lang="en-US" altLang="zh-CN" b="0"/>
           </a:p>
         </p:txBody>
       </p:sp>
@@ -5330,6 +5275,7 @@
           <a:bodyPr>
             <a:noAutofit/>
           </a:bodyPr>
+          <a:lstStyle/>
           <a:p>
             <a:pPr indent="266700"/>
             <a:endParaRPr lang="zh-CN" sz="2000" b="0">
@@ -5363,6 +5309,7 @@
           <a:bodyPr wrap="square">
             <a:spAutoFit/>
           </a:bodyPr>
+          <a:lstStyle/>
           <a:p>
             <a:pPr indent="127000" algn="l">
               <a:buClrTx/>
@@ -5377,11 +5324,6 @@
               </a:rPr>
               <a:t>开环仿真：通过对一组传感器的实测数据进行开环仿真，得到了以下PVT的仿真结果图。其中红线为模型输出结果，蓝线为SBG高精度惯性导航传感器参考数据。</a:t>
             </a:r>
-            <a:endParaRPr lang="zh-CN" sz="2000" b="0">
-              <a:latin typeface="宋体" panose="02010600030101010101" pitchFamily="2" charset="-122"/>
-              <a:ea typeface="宋体" panose="02010600030101010101" pitchFamily="2" charset="-122"/>
-              <a:cs typeface="宋体" panose="02010600030101010101" pitchFamily="2" charset="-122"/>
-            </a:endParaRPr>
           </a:p>
         </p:txBody>
       </p:sp>
@@ -5398,7 +5340,7 @@
           </p:nvPr>
         </p:nvPicPr>
         <p:blipFill>
-          <a:blip r:embed="rId2"/>
+          <a:blip r:embed="rId4"/>
           <a:stretch>
             <a:fillRect/>
           </a:stretch>
@@ -5425,12 +5367,12 @@
           </p:cNvPicPr>
           <p:nvPr>
             <p:custDataLst>
-              <p:tags r:id="rId3"/>
+              <p:tags r:id="rId2"/>
             </p:custDataLst>
           </p:nvPr>
         </p:nvPicPr>
         <p:blipFill>
-          <a:blip r:embed="rId4"/>
+          <a:blip r:embed="rId5"/>
           <a:srcRect r="254" b="32180"/>
           <a:stretch>
             <a:fillRect/>
@@ -5473,17 +5415,18 @@
           <a:bodyPr wrap="square">
             <a:spAutoFit/>
           </a:bodyPr>
+          <a:lstStyle/>
           <a:p>
             <a:pPr indent="266700"/>
             <a:r>
-              <a:rPr lang="zh-CN" sz="2000" b="0">
+              <a:rPr lang="zh-CN" altLang="zh-CN" sz="2000" b="0" dirty="0">
                 <a:latin typeface="宋体" panose="02010600030101010101" pitchFamily="2" charset="-122"/>
                 <a:ea typeface="宋体" panose="02010600030101010101" pitchFamily="2" charset="-122"/>
                 <a:cs typeface="宋体" panose="02010600030101010101" pitchFamily="2" charset="-122"/>
               </a:rPr>
               <a:t>由PVT输出波形可以得出，姿态偏差始终保持在2deg范围内，属于误差允许水平，而位置速度值则与参考 值基本重合。说明修正后的PVT值在实时性和准确性上都得到了很大部分的提升，同时也证实了该算法的可行性。</a:t>
             </a:r>
-            <a:endParaRPr lang="zh-CN" altLang="en-US" b="0">
+            <a:endParaRPr lang="zh-CN" altLang="en-US" sz="2000" b="0" dirty="0">
               <a:latin typeface="Calibri" panose="020F0502020204030204" pitchFamily="34" charset="0"/>
               <a:ea typeface="黑体" panose="02010609060101010101" charset="-122"/>
             </a:endParaRPr>
@@ -6489,6 +6432,7 @@
           <a:bodyPr wrap="square">
             <a:spAutoFit/>
           </a:bodyPr>
+          <a:lstStyle/>
           <a:p>
             <a:pPr indent="127000"/>
             <a:r>
@@ -6549,6 +6493,7 @@
         </p:style>
         <p:txBody>
           <a:bodyPr rtlCol="0" anchor="ctr"/>
+          <a:lstStyle/>
           <a:p>
             <a:pPr algn="ctr"/>
             <a:r>
@@ -6593,6 +6538,7 @@
           <a:bodyPr wrap="square" rtlCol="0">
             <a:spAutoFit/>
           </a:bodyPr>
+          <a:lstStyle/>
           <a:p>
             <a:r>
               <a:rPr lang="zh-CN" altLang="en-US" sz="2000">
@@ -6606,7 +6552,6 @@
               <a:rPr lang="zh-CN" altLang="en-US"/>
               <a:t>。</a:t>
             </a:r>
-            <a:endParaRPr lang="zh-CN" altLang="en-US"/>
           </a:p>
         </p:txBody>
       </p:sp>
@@ -6630,6 +6575,7 @@
           <a:bodyPr wrap="square" rtlCol="0">
             <a:spAutoFit/>
           </a:bodyPr>
+          <a:lstStyle/>
           <a:p>
             <a:r>
               <a:rPr lang="zh-CN" altLang="en-US" sz="2000">
@@ -6639,11 +6585,6 @@
               </a:rPr>
               <a:t>模型部署：Simulink在生成后的代码头文件中预留了模型IO接口变量和函数，因此需要为模型适配嵌入式端接口。</a:t>
             </a:r>
-            <a:endParaRPr lang="zh-CN" altLang="en-US" sz="2000">
-              <a:latin typeface="宋体" panose="02010600030101010101" pitchFamily="2" charset="-122"/>
-              <a:ea typeface="宋体" panose="02010600030101010101" pitchFamily="2" charset="-122"/>
-              <a:cs typeface="宋体" panose="02010600030101010101" pitchFamily="2" charset="-122"/>
-            </a:endParaRPr>
           </a:p>
         </p:txBody>
       </p:sp>
@@ -6670,6 +6611,7 @@
           <a:bodyPr wrap="square">
             <a:spAutoFit/>
           </a:bodyPr>
+          <a:lstStyle/>
           <a:p>
             <a:pPr indent="266700"/>
             <a:r>
@@ -6680,11 +6622,6 @@
               </a:rPr>
               <a:t>模型测试：在地面站发布运动指令控制小车运动，同时记录下模型输出信息，并在结束后与真实运动情况进行比对。拟结束时间：4.15</a:t>
             </a:r>
-            <a:endParaRPr lang="zh-CN" altLang="en-US" sz="2000" b="0">
-              <a:latin typeface="宋体" panose="02010600030101010101" pitchFamily="2" charset="-122"/>
-              <a:ea typeface="宋体" panose="02010600030101010101" pitchFamily="2" charset="-122"/>
-              <a:cs typeface="宋体" panose="02010600030101010101" pitchFamily="2" charset="-122"/>
-            </a:endParaRPr>
           </a:p>
         </p:txBody>
       </p:sp>
@@ -7531,13 +7468,13 @@
           <a:bodyPr wrap="square" rtlCol="0">
             <a:noAutofit/>
           </a:bodyPr>
+          <a:lstStyle/>
           <a:p>
             <a:pPr indent="457200"/>
             <a:r>
               <a:rPr sz="2400"/>
               <a:t>存在的问题：目前模型的输出精度评价仍依靠对比EKF算法输出精度，算法之间无法直接评价利弊。</a:t>
             </a:r>
-            <a:endParaRPr sz="2400"/>
           </a:p>
           <a:p>
             <a:pPr indent="457200"/>
@@ -7545,7 +7482,6 @@
               <a:rPr sz="2400"/>
               <a:t>困难：目前作品完成度较高，处于收尾阶段，未遇到较大困难。</a:t>
             </a:r>
-            <a:endParaRPr sz="2400"/>
           </a:p>
         </p:txBody>
       </p:sp>
@@ -7572,6 +7508,7 @@
           <a:bodyPr>
             <a:spAutoFit/>
           </a:bodyPr>
+          <a:lstStyle/>
           <a:p>
             <a:pPr indent="0"/>
             <a:r>
@@ -7584,13 +7521,6 @@
               </a:rPr>
               <a:t>论文按时完成的可能性</a:t>
             </a:r>
-            <a:endParaRPr lang="zh-CN" altLang="en-US" b="0" dirty="0">
-              <a:solidFill>
-                <a:schemeClr val="accent1"/>
-              </a:solidFill>
-              <a:latin typeface="微软雅黑" panose="020B0503020204020204" pitchFamily="34" charset="-122"/>
-              <a:ea typeface="微软雅黑" panose="020B0503020204020204" pitchFamily="34" charset="-122"/>
-            </a:endParaRPr>
           </a:p>
         </p:txBody>
       </p:sp>
@@ -7617,6 +7547,7 @@
           <a:bodyPr wrap="square">
             <a:spAutoFit/>
           </a:bodyPr>
+          <a:lstStyle/>
           <a:p>
             <a:pPr indent="266700" algn="l"/>
             <a:r>
@@ -7631,7 +7562,6 @@
               <a:rPr lang="zh-CN" altLang="en-US" sz="2400" b="0"/>
               <a:t>时完成的可能性很高。</a:t>
             </a:r>
-            <a:endParaRPr lang="zh-CN" altLang="en-US" sz="2400" b="0"/>
           </a:p>
         </p:txBody>
       </p:sp>
@@ -9182,14 +9112,6 @@
               </a:rPr>
               <a:t>论文工作是否按开题报告预</a:t>
             </a:r>
-            <a:endParaRPr lang="zh-CN" altLang="en-US" sz="2400" dirty="0">
-              <a:solidFill>
-                <a:schemeClr val="accent1"/>
-              </a:solidFill>
-              <a:latin typeface="微软雅黑" panose="020B0503020204020204" pitchFamily="34" charset="-122"/>
-              <a:ea typeface="微软雅黑" panose="020B0503020204020204" pitchFamily="34" charset="-122"/>
-              <a:sym typeface="+mn-lt"/>
-            </a:endParaRPr>
           </a:p>
           <a:p>
             <a:pPr algn="l">
@@ -9251,13 +9173,6 @@
               </a:rPr>
               <a:t>后期拟完成的研究</a:t>
             </a:r>
-            <a:endParaRPr lang="zh-CN" altLang="en-US" sz="2400" dirty="0">
-              <a:solidFill>
-                <a:schemeClr val="accent1"/>
-              </a:solidFill>
-              <a:latin typeface="微软雅黑" panose="020B0503020204020204" pitchFamily="34" charset="-122"/>
-              <a:ea typeface="微软雅黑" panose="020B0503020204020204" pitchFamily="34" charset="-122"/>
-            </a:endParaRPr>
           </a:p>
           <a:p>
             <a:pPr algn="l"/>
@@ -9271,13 +9186,6 @@
               </a:rPr>
               <a:t>工作及进度安排</a:t>
             </a:r>
-            <a:endParaRPr lang="zh-CN" altLang="en-US" sz="2400" dirty="0">
-              <a:solidFill>
-                <a:schemeClr val="accent1"/>
-              </a:solidFill>
-              <a:latin typeface="微软雅黑" panose="020B0503020204020204" pitchFamily="34" charset="-122"/>
-              <a:ea typeface="微软雅黑" panose="020B0503020204020204" pitchFamily="34" charset="-122"/>
-            </a:endParaRPr>
           </a:p>
         </p:txBody>
       </p:sp>
@@ -9314,13 +9222,6 @@
               </a:rPr>
               <a:t>已完成的研究工作及成果</a:t>
             </a:r>
-            <a:endParaRPr lang="zh-CN" altLang="en-US" sz="2400" dirty="0">
-              <a:solidFill>
-                <a:schemeClr val="accent1"/>
-              </a:solidFill>
-              <a:latin typeface="微软雅黑" panose="020B0503020204020204" pitchFamily="34" charset="-122"/>
-              <a:ea typeface="微软雅黑" panose="020B0503020204020204" pitchFamily="34" charset="-122"/>
-            </a:endParaRPr>
           </a:p>
         </p:txBody>
       </p:sp>
@@ -9357,13 +9258,6 @@
               </a:rPr>
               <a:t>存在的问题与困难</a:t>
             </a:r>
-            <a:endParaRPr lang="zh-CN" altLang="en-US" sz="2400" dirty="0">
-              <a:solidFill>
-                <a:schemeClr val="accent1"/>
-              </a:solidFill>
-              <a:latin typeface="微软雅黑" panose="020B0503020204020204" pitchFamily="34" charset="-122"/>
-              <a:ea typeface="微软雅黑" panose="020B0503020204020204" pitchFamily="34" charset="-122"/>
-            </a:endParaRPr>
           </a:p>
         </p:txBody>
       </p:sp>
@@ -9965,13 +9859,6 @@
               </a:rPr>
               <a:t>感谢您的观看！</a:t>
             </a:r>
-            <a:endParaRPr lang="zh-CN" altLang="en-US" sz="6000" dirty="0">
-              <a:solidFill>
-                <a:schemeClr val="accent1"/>
-              </a:solidFill>
-              <a:latin typeface="微软雅黑" panose="020B0503020204020204" pitchFamily="34" charset="-122"/>
-              <a:ea typeface="微软雅黑" panose="020B0503020204020204" pitchFamily="34" charset="-122"/>
-            </a:endParaRPr>
           </a:p>
         </p:txBody>
       </p:sp>
@@ -10023,6 +9910,7 @@
               <a:bodyPr wrap="square" rtlCol="0">
                 <a:spAutoFit/>
               </a:bodyPr>
+              <a:lstStyle/>
               <a:p>
                 <a:pPr marL="0" marR="0" lvl="0" algn="ctr" defTabSz="914400" rtl="0" eaLnBrk="1" fontAlgn="auto" latinLnBrk="0" hangingPunct="1">
                   <a:lnSpc>
@@ -10045,27 +9933,8 @@
                     <a:ea typeface="微软雅黑" panose="020B0503020204020204" pitchFamily="34" charset="-122"/>
                     <a:sym typeface="+mn-lt"/>
                   </a:rPr>
-                  <a:t>汇报人：</a:t>
+                  <a:t>汇报人：杨宇</a:t>
                 </a:r>
-                <a:r>
-                  <a:rPr kumimoji="0" lang="zh-CN" altLang="en-US" b="0" i="0" u="none" strike="noStrike" kern="1200" cap="none" spc="0" normalizeH="0" baseline="0" dirty="0">
-                    <a:solidFill>
-                      <a:schemeClr val="accent1"/>
-                    </a:solidFill>
-                    <a:latin typeface="微软雅黑" panose="020B0503020204020204" pitchFamily="34" charset="-122"/>
-                    <a:ea typeface="微软雅黑" panose="020B0503020204020204" pitchFamily="34" charset="-122"/>
-                    <a:sym typeface="+mn-lt"/>
-                  </a:rPr>
-                  <a:t>杨宇</a:t>
-                </a:r>
-                <a:endParaRPr kumimoji="0" lang="zh-CN" altLang="en-US" b="0" i="0" u="none" strike="noStrike" kern="1200" cap="none" spc="0" normalizeH="0" baseline="0" dirty="0">
-                  <a:solidFill>
-                    <a:schemeClr val="accent1"/>
-                  </a:solidFill>
-                  <a:latin typeface="微软雅黑" panose="020B0503020204020204" pitchFamily="34" charset="-122"/>
-                  <a:ea typeface="微软雅黑" panose="020B0503020204020204" pitchFamily="34" charset="-122"/>
-                  <a:sym typeface="+mn-lt"/>
-                </a:endParaRPr>
               </a:p>
             </p:txBody>
           </p:sp>
@@ -10089,6 +9958,7 @@
               <a:bodyPr wrap="square" rtlCol="0">
                 <a:spAutoFit/>
               </a:bodyPr>
+              <a:lstStyle/>
               <a:p>
                 <a:pPr marL="0" marR="0" lvl="0" indent="0" defTabSz="914400" rtl="0" eaLnBrk="1" fontAlgn="auto" latinLnBrk="0" hangingPunct="1">
                   <a:lnSpc>
@@ -10178,7 +10048,7 @@
             <p:nvPr/>
           </p:nvPicPr>
           <p:blipFill>
-            <a:blip r:embed="rId1"/>
+            <a:blip r:embed="rId2"/>
             <a:stretch>
               <a:fillRect/>
             </a:stretch>
@@ -10202,7 +10072,7 @@
             <p:nvPr/>
           </p:nvPicPr>
           <p:blipFill>
-            <a:blip r:embed="rId2"/>
+            <a:blip r:embed="rId3"/>
             <a:stretch>
               <a:fillRect/>
             </a:stretch>
@@ -10467,14 +10337,6 @@
               </a:rPr>
               <a:t>论文工作是否按开题报告预</a:t>
             </a:r>
-            <a:endParaRPr lang="zh-CN" altLang="en-US" sz="4000" dirty="0">
-              <a:solidFill>
-                <a:schemeClr val="accent1"/>
-              </a:solidFill>
-              <a:latin typeface="微软雅黑" panose="020B0503020204020204" pitchFamily="34" charset="-122"/>
-              <a:ea typeface="微软雅黑" panose="020B0503020204020204" pitchFamily="34" charset="-122"/>
-              <a:sym typeface="+mn-lt"/>
-            </a:endParaRPr>
           </a:p>
           <a:p>
             <a:pPr algn="l">
@@ -10913,14 +10775,6 @@
               </a:rPr>
               <a:t>论文工作是否按开题报告预</a:t>
             </a:r>
-            <a:endParaRPr lang="zh-CN" altLang="en-US" sz="2400" dirty="0">
-              <a:solidFill>
-                <a:schemeClr val="accent1"/>
-              </a:solidFill>
-              <a:latin typeface="微软雅黑" panose="020B0503020204020204" pitchFamily="34" charset="-122"/>
-              <a:ea typeface="微软雅黑" panose="020B0503020204020204" pitchFamily="34" charset="-122"/>
-              <a:sym typeface="+mn-lt"/>
-            </a:endParaRPr>
           </a:p>
           <a:p>
             <a:pPr>
@@ -11311,6 +11165,7 @@
           <a:bodyPr>
             <a:noAutofit/>
           </a:bodyPr>
+          <a:lstStyle/>
           <a:p>
             <a:pPr indent="304800"/>
             <a:r>
@@ -11323,13 +11178,6 @@
               </a:rPr>
               <a:t>截至目前4月4日，论文工作进展为完成惯性导航系统（INS）算法设计与验证，和STM32硬件驱动设计，成功按照开题报告预定的内容及进度安排进行。</a:t>
             </a:r>
-            <a:endParaRPr lang="zh-CN" altLang="en-US" sz="3200" b="0" dirty="0">
-              <a:solidFill>
-                <a:schemeClr val="accent1"/>
-              </a:solidFill>
-              <a:latin typeface="微软雅黑" panose="020B0503020204020204" pitchFamily="34" charset="-122"/>
-              <a:ea typeface="微软雅黑" panose="020B0503020204020204" pitchFamily="34" charset="-122"/>
-            </a:endParaRPr>
           </a:p>
         </p:txBody>
       </p:sp>
@@ -12179,6 +12027,7 @@
           <a:bodyPr>
             <a:noAutofit/>
           </a:bodyPr>
+          <a:lstStyle/>
           <a:p>
             <a:pPr indent="266700"/>
             <a:r>
@@ -12546,7 +12395,7 @@
           </p:nvPr>
         </p:nvPicPr>
         <p:blipFill>
-          <a:blip r:embed="rId2"/>
+          <a:blip r:embed="rId5"/>
           <a:stretch>
             <a:fillRect/>
           </a:stretch>
@@ -12588,6 +12437,7 @@
           <a:bodyPr wrap="square">
             <a:spAutoFit/>
           </a:bodyPr>
+          <a:lstStyle/>
           <a:p>
             <a:pPr indent="266700" algn="l">
               <a:buClrTx/>
@@ -12649,10 +12499,6 @@
               </a:rPr>
               <a:t>。</a:t>
             </a:r>
-            <a:endParaRPr lang="zh-CN" sz="2000" b="0">
-              <a:latin typeface="Calibri" panose="020F0502020204030204" pitchFamily="34" charset="0"/>
-              <a:ea typeface="黑体" panose="02010609060101010101" charset="-122"/>
-            </a:endParaRPr>
           </a:p>
         </p:txBody>
       </p:sp>
@@ -12664,12 +12510,12 @@
           </p:cNvPicPr>
           <p:nvPr>
             <p:custDataLst>
-              <p:tags r:id="rId3"/>
+              <p:tags r:id="rId2"/>
             </p:custDataLst>
           </p:nvPr>
         </p:nvPicPr>
         <p:blipFill>
-          <a:blip r:embed="rId4"/>
+          <a:blip r:embed="rId6"/>
           <a:stretch>
             <a:fillRect/>
           </a:stretch>
@@ -12708,6 +12554,7 @@
           <a:bodyPr wrap="square" rtlCol="0">
             <a:spAutoFit/>
           </a:bodyPr>
+          <a:lstStyle/>
           <a:p>
             <a:r>
               <a:rPr lang="zh-CN" altLang="en-US">
@@ -12737,7 +12584,7 @@
           <p:cNvSpPr txBox="1"/>
           <p:nvPr>
             <p:custDataLst>
-              <p:tags r:id="rId5"/>
+              <p:tags r:id="rId3"/>
             </p:custDataLst>
           </p:nvPr>
         </p:nvSpPr>
@@ -12755,6 +12602,7 @@
           <a:bodyPr wrap="square" rtlCol="0">
             <a:spAutoFit/>
           </a:bodyPr>
+          <a:lstStyle/>
           <a:p>
             <a:r>
               <a:rPr lang="zh-CN" altLang="en-US">
@@ -12774,9 +12622,6 @@
               </a:rPr>
               <a:t>）串口控制台输出</a:t>
             </a:r>
-            <a:endParaRPr lang="zh-CN" altLang="en-US">
-              <a:sym typeface="+mn-ea"/>
-            </a:endParaRPr>
           </a:p>
         </p:txBody>
       </p:sp>
@@ -13210,6 +13055,7 @@
           <a:bodyPr>
             <a:noAutofit/>
           </a:bodyPr>
+          <a:lstStyle/>
           <a:p>
             <a:pPr indent="266700"/>
             <a:r>
@@ -13220,11 +13066,6 @@
               </a:rPr>
               <a:t>下图展示了自驾仪连接到地面站的情形，右上角显示的为自驾仪的姿态速度信息，在获取GPS信号后可以在地图上实时显示当前位置，同时通过MAVLINK协议可以实现对自驾仪的远程监视与操控。</a:t>
             </a:r>
-            <a:endParaRPr lang="zh-CN" sz="2000" b="0">
-              <a:latin typeface="宋体" panose="02010600030101010101" pitchFamily="2" charset="-122"/>
-              <a:ea typeface="宋体" panose="02010600030101010101" pitchFamily="2" charset="-122"/>
-              <a:cs typeface="宋体" panose="02010600030101010101" pitchFamily="2" charset="-122"/>
-            </a:endParaRPr>
           </a:p>
         </p:txBody>
       </p:sp>
@@ -13241,7 +13082,7 @@
           </p:nvPr>
         </p:nvPicPr>
         <p:blipFill>
-          <a:blip r:embed="rId2"/>
+          <a:blip r:embed="rId3"/>
           <a:stretch>
             <a:fillRect/>
           </a:stretch>
@@ -13283,6 +13124,7 @@
           <a:bodyPr>
             <a:spAutoFit/>
           </a:bodyPr>
+          <a:lstStyle/>
           <a:p>
             <a:pPr indent="127000"/>
             <a:r>
@@ -13757,10 +13599,11 @@
           <a:bodyPr>
             <a:noAutofit/>
           </a:bodyPr>
+          <a:lstStyle/>
           <a:p>
             <a:pPr indent="266700"/>
             <a:r>
-              <a:rPr lang="zh-CN" sz="2000">
+              <a:rPr lang="zh-CN" sz="2000" dirty="0">
                 <a:latin typeface="宋体" panose="02010600030101010101" pitchFamily="2" charset="-122"/>
                 <a:ea typeface="宋体" panose="02010600030101010101" pitchFamily="2" charset="-122"/>
                 <a:cs typeface="宋体" panose="02010600030101010101" pitchFamily="2" charset="-122"/>
@@ -13768,7 +13611,7 @@
               </a:rPr>
               <a:t>截止3月28日，针对嵌入式传感器的惯性导航系统（INS）模型的算法设计与验证已圆满完成。</a:t>
             </a:r>
-            <a:endParaRPr lang="zh-CN" sz="2000" b="0">
+            <a:endParaRPr lang="zh-CN" sz="2000" b="0" dirty="0">
               <a:latin typeface="宋体" panose="02010600030101010101" pitchFamily="2" charset="-122"/>
               <a:ea typeface="宋体" panose="02010600030101010101" pitchFamily="2" charset="-122"/>
               <a:cs typeface="宋体" panose="02010600030101010101" pitchFamily="2" charset="-122"/>
@@ -13777,34 +13620,24 @@
           <a:p>
             <a:pPr indent="266700"/>
             <a:r>
-              <a:rPr lang="zh-CN" sz="2000" b="0">
+              <a:rPr lang="zh-CN" sz="2000" b="0" dirty="0">
                 <a:latin typeface="宋体" panose="02010600030101010101" pitchFamily="2" charset="-122"/>
                 <a:ea typeface="宋体" panose="02010600030101010101" pitchFamily="2" charset="-122"/>
                 <a:cs typeface="宋体" panose="02010600030101010101" pitchFamily="2" charset="-122"/>
               </a:rPr>
               <a:t>Part 1.数据预处理：模型从IMU，GPS，MAG等多个传感器理论分析入手，依据各传感器特性对输入信息进行滤波，变换等。</a:t>
             </a:r>
-            <a:endParaRPr lang="zh-CN" sz="2000" b="0">
-              <a:latin typeface="宋体" panose="02010600030101010101" pitchFamily="2" charset="-122"/>
-              <a:ea typeface="宋体" panose="02010600030101010101" pitchFamily="2" charset="-122"/>
-              <a:cs typeface="宋体" panose="02010600030101010101" pitchFamily="2" charset="-122"/>
-            </a:endParaRPr>
           </a:p>
           <a:p>
             <a:pPr indent="266700"/>
             <a:r>
-              <a:rPr lang="zh-CN" sz="2000" b="0">
+              <a:rPr lang="zh-CN" sz="2000" b="0" dirty="0">
                 <a:latin typeface="宋体" panose="02010600030101010101" pitchFamily="2" charset="-122"/>
                 <a:ea typeface="宋体" panose="02010600030101010101" pitchFamily="2" charset="-122"/>
                 <a:cs typeface="宋体" panose="02010600030101010101" pitchFamily="2" charset="-122"/>
               </a:rPr>
               <a:t>IMU由于自身存在噪声和高频振动等问题，因此需要进行低通滤波以去除高频噪声，保留低频信息。因此，我引用了二阶低通Butterworth滤波器以实现对加速度信号的滤波。</a:t>
             </a:r>
-            <a:endParaRPr lang="zh-CN" sz="2000" b="0">
-              <a:latin typeface="宋体" panose="02010600030101010101" pitchFamily="2" charset="-122"/>
-              <a:ea typeface="宋体" panose="02010600030101010101" pitchFamily="2" charset="-122"/>
-              <a:cs typeface="宋体" panose="02010600030101010101" pitchFamily="2" charset="-122"/>
-            </a:endParaRPr>
           </a:p>
         </p:txBody>
       </p:sp>
@@ -13821,7 +13654,7 @@
           </p:nvPr>
         </p:nvPicPr>
         <p:blipFill>
-          <a:blip r:embed="rId2"/>
+          <a:blip r:embed="rId3"/>
           <a:stretch>
             <a:fillRect/>
           </a:stretch>
@@ -13863,13 +13696,13 @@
           <a:bodyPr>
             <a:spAutoFit/>
           </a:bodyPr>
+          <a:lstStyle/>
           <a:p>
             <a:pPr indent="266700" algn="ctr"/>
             <a:r>
               <a:rPr lang="zh-CN" altLang="en-US" b="0"/>
               <a:t>图4 数字二阶低通滤波器</a:t>
             </a:r>
-            <a:endParaRPr lang="zh-CN" altLang="en-US" b="0"/>
           </a:p>
         </p:txBody>
       </p:sp>
@@ -14303,21 +14136,17 @@
           <a:bodyPr>
             <a:noAutofit/>
           </a:bodyPr>
+          <a:lstStyle/>
           <a:p>
             <a:pPr indent="266700"/>
             <a:r>
-              <a:rPr lang="zh-CN" sz="2000" b="0">
+              <a:rPr lang="zh-CN" sz="2000" b="0" dirty="0">
                 <a:latin typeface="宋体" panose="02010600030101010101" pitchFamily="2" charset="-122"/>
                 <a:ea typeface="宋体" panose="02010600030101010101" pitchFamily="2" charset="-122"/>
                 <a:cs typeface="宋体" panose="02010600030101010101" pitchFamily="2" charset="-122"/>
               </a:rPr>
               <a:t>GPS接收器接收到的信号存在延迟和抖动等问题，因此需要对位置和速度信号进行延迟采样。</a:t>
             </a:r>
-            <a:endParaRPr lang="zh-CN" sz="2000" b="0">
-              <a:latin typeface="宋体" panose="02010600030101010101" pitchFamily="2" charset="-122"/>
-              <a:ea typeface="宋体" panose="02010600030101010101" pitchFamily="2" charset="-122"/>
-              <a:cs typeface="宋体" panose="02010600030101010101" pitchFamily="2" charset="-122"/>
-            </a:endParaRPr>
           </a:p>
         </p:txBody>
       </p:sp>
@@ -14328,7 +14157,7 @@
           <p:nvPr/>
         </p:nvPicPr>
         <p:blipFill>
-          <a:blip r:embed="rId1"/>
+          <a:blip r:embed="rId2"/>
           <a:stretch>
             <a:fillRect/>
           </a:stretch>
@@ -14370,6 +14199,7 @@
           <a:bodyPr wrap="square">
             <a:spAutoFit/>
           </a:bodyPr>
+          <a:lstStyle/>
           <a:p>
             <a:pPr indent="266700" algn="l"/>
             <a:r>
@@ -14383,7 +14213,6 @@
               <a:rPr lang="zh-CN" altLang="en-US" b="0"/>
               <a:t>图4 位置速度信号的数字延迟器</a:t>
             </a:r>
-            <a:endParaRPr lang="zh-CN" altLang="en-US" b="0"/>
           </a:p>
           <a:p>
             <a:endParaRPr lang="zh-CN" sz="2000" b="0">
@@ -14403,98 +14232,98 @@
 </file>
 
 <file path=ppt/tags/tag1.xml><?xml version="1.0" encoding="utf-8"?>
-<p:tagLst xmlns:p="http://schemas.openxmlformats.org/presentationml/2006/main">
-  <p:tag name="KSO_WM_BEAUTIFY_FLAG" val=""/>
+<p:tagLst xmlns:a="http://schemas.openxmlformats.org/drawingml/2006/main" xmlns:r="http://schemas.openxmlformats.org/officeDocument/2006/relationships" xmlns:p="http://schemas.openxmlformats.org/presentationml/2006/main">
+  <p:tag name="KSO_WPP_MARK_KEY" val="fc48dd8d-9123-450e-8581-dfb3346f9c21"/>
+  <p:tag name="COMMONDATA" val="eyJjb3VudCI6MTksImhkaWQiOiI5MTdlMmUyY2JhNmViMzkwOWRkNmY2ZjVmY2VjNGJkNCIsInVzZXJDb3VudCI6M30="/>
 </p:tagLst>
 </file>
 
 <file path=ppt/tags/tag10.xml><?xml version="1.0" encoding="utf-8"?>
-<p:tagLst xmlns:p="http://schemas.openxmlformats.org/presentationml/2006/main">
+<p:tagLst xmlns:a="http://schemas.openxmlformats.org/drawingml/2006/main" xmlns:r="http://schemas.openxmlformats.org/officeDocument/2006/relationships" xmlns:p="http://schemas.openxmlformats.org/presentationml/2006/main">
   <p:tag name="KSO_WM_BEAUTIFY_FLAG" val=""/>
 </p:tagLst>
 </file>
 
 <file path=ppt/tags/tag11.xml><?xml version="1.0" encoding="utf-8"?>
-<p:tagLst xmlns:p="http://schemas.openxmlformats.org/presentationml/2006/main">
+<p:tagLst xmlns:a="http://schemas.openxmlformats.org/drawingml/2006/main" xmlns:r="http://schemas.openxmlformats.org/officeDocument/2006/relationships" xmlns:p="http://schemas.openxmlformats.org/presentationml/2006/main">
   <p:tag name="KSO_WM_BEAUTIFY_FLAG" val=""/>
 </p:tagLst>
 </file>
 
 <file path=ppt/tags/tag12.xml><?xml version="1.0" encoding="utf-8"?>
-<p:tagLst xmlns:p="http://schemas.openxmlformats.org/presentationml/2006/main">
+<p:tagLst xmlns:a="http://schemas.openxmlformats.org/drawingml/2006/main" xmlns:r="http://schemas.openxmlformats.org/officeDocument/2006/relationships" xmlns:p="http://schemas.openxmlformats.org/presentationml/2006/main">
   <p:tag name="KSO_WM_BEAUTIFY_FLAG" val=""/>
 </p:tagLst>
 </file>
 
 <file path=ppt/tags/tag13.xml><?xml version="1.0" encoding="utf-8"?>
-<p:tagLst xmlns:p="http://schemas.openxmlformats.org/presentationml/2006/main">
+<p:tagLst xmlns:a="http://schemas.openxmlformats.org/drawingml/2006/main" xmlns:r="http://schemas.openxmlformats.org/officeDocument/2006/relationships" xmlns:p="http://schemas.openxmlformats.org/presentationml/2006/main">
   <p:tag name="KSO_WM_BEAUTIFY_FLAG" val=""/>
 </p:tagLst>
 </file>
 
 <file path=ppt/tags/tag14.xml><?xml version="1.0" encoding="utf-8"?>
-<p:tagLst xmlns:p="http://schemas.openxmlformats.org/presentationml/2006/main">
+<p:tagLst xmlns:a="http://schemas.openxmlformats.org/drawingml/2006/main" xmlns:r="http://schemas.openxmlformats.org/officeDocument/2006/relationships" xmlns:p="http://schemas.openxmlformats.org/presentationml/2006/main">
   <p:tag name="KSO_WM_BEAUTIFY_FLAG" val=""/>
 </p:tagLst>
 </file>
 
 <file path=ppt/tags/tag15.xml><?xml version="1.0" encoding="utf-8"?>
-<p:tagLst xmlns:p="http://schemas.openxmlformats.org/presentationml/2006/main">
+<p:tagLst xmlns:a="http://schemas.openxmlformats.org/drawingml/2006/main" xmlns:r="http://schemas.openxmlformats.org/officeDocument/2006/relationships" xmlns:p="http://schemas.openxmlformats.org/presentationml/2006/main">
   <p:tag name="KSO_WM_BEAUTIFY_FLAG" val=""/>
 </p:tagLst>
 </file>
 
 <file path=ppt/tags/tag16.xml><?xml version="1.0" encoding="utf-8"?>
-<p:tagLst xmlns:p="http://schemas.openxmlformats.org/presentationml/2006/main">
-  <p:tag name="KSO_WPP_MARK_KEY" val="fc48dd8d-9123-450e-8581-dfb3346f9c21"/>
-  <p:tag name="COMMONDATA" val="eyJjb3VudCI6MTksImhkaWQiOiI5MTdlMmUyY2JhNmViMzkwOWRkNmY2ZjVmY2VjNGJkNCIsInVzZXJDb3VudCI6M30="/>
+<p:tagLst xmlns:a="http://schemas.openxmlformats.org/drawingml/2006/main" xmlns:r="http://schemas.openxmlformats.org/officeDocument/2006/relationships" xmlns:p="http://schemas.openxmlformats.org/presentationml/2006/main">
+  <p:tag name="KSO_WM_BEAUTIFY_FLAG" val=""/>
 </p:tagLst>
 </file>
 
 <file path=ppt/tags/tag2.xml><?xml version="1.0" encoding="utf-8"?>
-<p:tagLst xmlns:p="http://schemas.openxmlformats.org/presentationml/2006/main">
+<p:tagLst xmlns:a="http://schemas.openxmlformats.org/drawingml/2006/main" xmlns:r="http://schemas.openxmlformats.org/officeDocument/2006/relationships" xmlns:p="http://schemas.openxmlformats.org/presentationml/2006/main">
   <p:tag name="KSO_WM_BEAUTIFY_FLAG" val=""/>
 </p:tagLst>
 </file>
 
 <file path=ppt/tags/tag3.xml><?xml version="1.0" encoding="utf-8"?>
-<p:tagLst xmlns:p="http://schemas.openxmlformats.org/presentationml/2006/main">
+<p:tagLst xmlns:a="http://schemas.openxmlformats.org/drawingml/2006/main" xmlns:r="http://schemas.openxmlformats.org/officeDocument/2006/relationships" xmlns:p="http://schemas.openxmlformats.org/presentationml/2006/main">
   <p:tag name="KSO_WM_BEAUTIFY_FLAG" val=""/>
 </p:tagLst>
 </file>
 
 <file path=ppt/tags/tag4.xml><?xml version="1.0" encoding="utf-8"?>
-<p:tagLst xmlns:p="http://schemas.openxmlformats.org/presentationml/2006/main">
+<p:tagLst xmlns:a="http://schemas.openxmlformats.org/drawingml/2006/main" xmlns:r="http://schemas.openxmlformats.org/officeDocument/2006/relationships" xmlns:p="http://schemas.openxmlformats.org/presentationml/2006/main">
   <p:tag name="KSO_WM_BEAUTIFY_FLAG" val=""/>
 </p:tagLst>
 </file>
 
 <file path=ppt/tags/tag5.xml><?xml version="1.0" encoding="utf-8"?>
-<p:tagLst xmlns:p="http://schemas.openxmlformats.org/presentationml/2006/main">
+<p:tagLst xmlns:a="http://schemas.openxmlformats.org/drawingml/2006/main" xmlns:r="http://schemas.openxmlformats.org/officeDocument/2006/relationships" xmlns:p="http://schemas.openxmlformats.org/presentationml/2006/main">
   <p:tag name="KSO_WM_BEAUTIFY_FLAG" val=""/>
 </p:tagLst>
 </file>
 
 <file path=ppt/tags/tag6.xml><?xml version="1.0" encoding="utf-8"?>
-<p:tagLst xmlns:p="http://schemas.openxmlformats.org/presentationml/2006/main">
+<p:tagLst xmlns:a="http://schemas.openxmlformats.org/drawingml/2006/main" xmlns:r="http://schemas.openxmlformats.org/officeDocument/2006/relationships" xmlns:p="http://schemas.openxmlformats.org/presentationml/2006/main">
   <p:tag name="KSO_WM_BEAUTIFY_FLAG" val=""/>
 </p:tagLst>
 </file>
 
 <file path=ppt/tags/tag7.xml><?xml version="1.0" encoding="utf-8"?>
-<p:tagLst xmlns:p="http://schemas.openxmlformats.org/presentationml/2006/main">
+<p:tagLst xmlns:a="http://schemas.openxmlformats.org/drawingml/2006/main" xmlns:r="http://schemas.openxmlformats.org/officeDocument/2006/relationships" xmlns:p="http://schemas.openxmlformats.org/presentationml/2006/main">
   <p:tag name="KSO_WM_BEAUTIFY_FLAG" val=""/>
 </p:tagLst>
 </file>
 
 <file path=ppt/tags/tag8.xml><?xml version="1.0" encoding="utf-8"?>
-<p:tagLst xmlns:p="http://schemas.openxmlformats.org/presentationml/2006/main">
+<p:tagLst xmlns:a="http://schemas.openxmlformats.org/drawingml/2006/main" xmlns:r="http://schemas.openxmlformats.org/officeDocument/2006/relationships" xmlns:p="http://schemas.openxmlformats.org/presentationml/2006/main">
   <p:tag name="KSO_WM_BEAUTIFY_FLAG" val=""/>
 </p:tagLst>
 </file>
 
 <file path=ppt/tags/tag9.xml><?xml version="1.0" encoding="utf-8"?>
-<p:tagLst xmlns:p="http://schemas.openxmlformats.org/presentationml/2006/main">
+<p:tagLst xmlns:a="http://schemas.openxmlformats.org/drawingml/2006/main" xmlns:r="http://schemas.openxmlformats.org/officeDocument/2006/relationships" xmlns:p="http://schemas.openxmlformats.org/presentationml/2006/main">
   <p:tag name="KSO_WM_BEAUTIFY_FLAG" val=""/>
 </p:tagLst>
 </file>
@@ -14750,6 +14579,8 @@
       </a:bgFillStyleLst>
     </a:fmtScheme>
   </a:themeElements>
+  <a:objectDefaults/>
+  <a:extraClrSchemeLst/>
   <a:extLst>
     <a:ext uri="{05A4C25C-085E-4340-85A3-A5531E510DB2}">
       <thm15:themeFamily xmlns:thm15="http://schemas.microsoft.com/office/thememl/2012/main" name="Office Theme" id="{62F939B6-93AF-4DB8-9C6B-D6C7DFDC589F}" vid="{4A3C46E8-61CC-4603-A589-7422A47A8E4A}"/>
